--- a/slides-3-gray-levels.pptx
+++ b/slides-3-gray-levels.pptx
@@ -19,6 +19,7 @@
     <p:sldId id="263" r:id="rId10"/>
     <p:sldId id="264" r:id="rId11"/>
     <p:sldId id="265" r:id="rId12"/>
+    <p:sldId id="270" r:id="rId20"/>
     <p:sldId id="266" r:id="rId13"/>
     <p:sldId id="267" r:id="rId14"/>
   </p:sldIdLst>
@@ -4005,7 +4006,7 @@
                 <a:ea typeface="Microsoft JhengHei" pitchFamily="34" charset="-122"/>
                 <a:cs typeface="Microsoft JhengHei" pitchFamily="34" charset="-120"/>
               </a:rPr>
-              <a:t>MISSION 03 · 火星第一眼：1976 維京一號的拍照任務　11</a:t>
+              <a:t>MISSION 03 · 火星第一眼：1976 維京一號的拍照任務　12</a:t>
             </a:r>
             <a:endParaRPr lang="en-US" sz="900" dirty="0"/>
           </a:p>
@@ -4044,7 +4045,7 @@
                 <a:ea typeface="Microsoft JhengHei" pitchFamily="34" charset="-122"/>
                 <a:cs typeface="Microsoft JhengHei" pitchFamily="34" charset="-120"/>
               </a:rPr>
-              <a:t>🏠 課後延伸挑戰</a:t>
+              <a:t>📱 綜合活動：把你的照片變黑白</a:t>
             </a:r>
             <a:endParaRPr lang="en-US" sz="2400" dirty="0"/>
           </a:p>
@@ -4083,7 +4084,7 @@
                 <a:ea typeface="Microsoft JhengHei" pitchFamily="34" charset="-122"/>
                 <a:cs typeface="Microsoft JhengHei" pitchFamily="34" charset="-120"/>
               </a:rPr>
-              <a:t>想一想：把灰色的色階增加為 8 種，</a:t>
+              <a:t>在平板為自己的照片套上黑白（灰階）濾鏡，</a:t>
             </a:r>
             <a:endParaRPr lang="en-US" sz="3000" dirty="0"/>
           </a:p>
@@ -4122,7 +4123,7 @@
                 <a:ea typeface="Microsoft JhengHei" pitchFamily="34" charset="-122"/>
                 <a:cs typeface="Microsoft JhengHei" pitchFamily="34" charset="-120"/>
               </a:rPr>
-              <a:t>訊號要怎麼約定呢？</a:t>
+              <a:t>照片裡有幾種灰？數得完嗎？</a:t>
             </a:r>
             <a:endParaRPr lang="en-US" sz="3600" dirty="0"/>
           </a:p>
@@ -4391,7 +4392,7 @@
                 <a:ea typeface="Microsoft JhengHei" pitchFamily="34" charset="-122"/>
                 <a:cs typeface="Microsoft JhengHei" pitchFamily="34" charset="-120"/>
               </a:rPr>
-              <a:t>提示</a:t>
+              <a:t>發現</a:t>
             </a:r>
             <a:endParaRPr lang="en-US" sz="2500" dirty="0" smtClean="0">
               <a:solidFill>
@@ -4418,7 +4419,7 @@
                 <a:ea typeface="Microsoft JhengHei" pitchFamily="34" charset="-122"/>
                 <a:cs typeface="Microsoft JhengHei" pitchFamily="34" charset="-120"/>
               </a:rPr>
-              <a:t>兩個</a:t>
+              <a:t>黑白照片不是只剩黑與白——深深淺淺的灰階層次，靠的正是更多階的「亮度數字」。</a:t>
             </a:r>
             <a:r>
               <a:rPr lang="en-US" sz="2200" dirty="0" smtClean="0">
@@ -4429,7 +4430,7 @@
                 <a:ea typeface="Microsoft JhengHei" pitchFamily="34" charset="-122"/>
                 <a:cs typeface="Microsoft JhengHei" pitchFamily="34" charset="-120"/>
               </a:rPr>
-              <a:t> </a:t>
+              <a:t/>
             </a:r>
             <a:r>
               <a:rPr lang="en-US" sz="2200" dirty="0">
@@ -4440,7 +4441,7 @@
                 <a:ea typeface="Microsoft JhengHei" pitchFamily="34" charset="-122"/>
                 <a:cs typeface="Microsoft JhengHei" pitchFamily="34" charset="-120"/>
               </a:rPr>
-              <a:t>0／1 訊號只有 00、01、10、11 四種組合，8 </a:t>
+              <a:t/>
             </a:r>
             <a:r>
               <a:rPr lang="en-US" sz="2200" dirty="0" err="1" smtClean="0">
@@ -4451,7 +4452,7 @@
                 <a:ea typeface="Microsoft JhengHei" pitchFamily="34" charset="-122"/>
                 <a:cs typeface="Microsoft JhengHei" pitchFamily="34" charset="-120"/>
               </a:rPr>
-              <a:t>種亮度</a:t>
+              <a:t/>
             </a:r>
             <a:r>
               <a:rPr lang="zh-TW" altLang="en-US" sz="2200" dirty="0" smtClean="0">
@@ -4462,7 +4463,7 @@
                 <a:ea typeface="Microsoft JhengHei" pitchFamily="34" charset="-122"/>
                 <a:cs typeface="Microsoft JhengHei" pitchFamily="34" charset="-120"/>
               </a:rPr>
-              <a:t>不夠用，怎麼辦？</a:t>
+              <a:t/>
             </a:r>
             <a:endParaRPr lang="en-US" sz="2200" dirty="0"/>
           </a:p>
@@ -4477,6 +4478,535 @@
 </file>
 
 <file path=ppt/slides/slide13.xml><?xml version="1.0" encoding="utf-8"?>
+<p:sld xmlns:a="http://schemas.openxmlformats.org/drawingml/2006/main" xmlns:r="http://schemas.openxmlformats.org/officeDocument/2006/relationships" xmlns:p="http://schemas.openxmlformats.org/presentationml/2006/main">
+  <p:cSld name="Slide 11">
+    <p:bg>
+      <p:bgPr>
+        <a:solidFill>
+          <a:srgbClr val="070B14"/>
+        </a:solidFill>
+        <a:effectLst/>
+      </p:bgPr>
+    </p:bg>
+    <p:spTree>
+      <p:nvGrpSpPr>
+        <p:cNvPr id="1" name=""/>
+        <p:cNvGrpSpPr/>
+        <p:nvPr/>
+      </p:nvGrpSpPr>
+      <p:grpSpPr>
+        <a:xfrm>
+          <a:off x="0" y="0"/>
+          <a:ext cx="0" cy="0"/>
+          <a:chOff x="0" y="0"/>
+          <a:chExt cx="0" cy="0"/>
+        </a:xfrm>
+      </p:grpSpPr>
+      <p:sp>
+        <p:nvSpPr>
+          <p:cNvPr id="2" name="Text 0"/>
+          <p:cNvSpPr/>
+          <p:nvPr/>
+        </p:nvSpPr>
+        <p:spPr>
+          <a:xfrm>
+            <a:off x="457200" y="6473952"/>
+            <a:ext cx="7315200" cy="274320"/>
+          </a:xfrm>
+          <a:prstGeom prst="rect">
+            <a:avLst/>
+          </a:prstGeom>
+          <a:noFill/>
+          <a:ln/>
+        </p:spPr>
+        <p:txBody>
+          <a:bodyPr wrap="square" lIns="0" tIns="0" rIns="0" bIns="0" rtlCol="0" anchor="ctr"/>
+          <a:lstStyle/>
+          <a:p>
+            <a:pPr marL="0" indent="0">
+              <a:buNone/>
+            </a:pPr>
+            <a:r>
+              <a:rPr lang="en-US" sz="900" dirty="0">
+                <a:solidFill>
+                  <a:srgbClr val="7A93AE"/>
+                </a:solidFill>
+                <a:latin typeface="Microsoft JhengHei" pitchFamily="34" charset="0"/>
+                <a:ea typeface="Microsoft JhengHei" pitchFamily="34" charset="-122"/>
+                <a:cs typeface="Microsoft JhengHei" pitchFamily="34" charset="-120"/>
+              </a:rPr>
+              <a:t>MISSION 03 · 火星第一眼：1976 維京一號的拍照任務　11</a:t>
+            </a:r>
+            <a:endParaRPr lang="en-US" sz="900" dirty="0"/>
+          </a:p>
+        </p:txBody>
+      </p:sp>
+      <p:sp>
+        <p:nvSpPr>
+          <p:cNvPr id="4" name="Text 1"/>
+          <p:cNvSpPr/>
+          <p:nvPr/>
+        </p:nvSpPr>
+        <p:spPr>
+          <a:xfrm>
+            <a:off x="457200" y="411480"/>
+            <a:ext cx="5486400" cy="502920"/>
+          </a:xfrm>
+          <a:prstGeom prst="rect">
+            <a:avLst/>
+          </a:prstGeom>
+          <a:noFill/>
+          <a:ln/>
+        </p:spPr>
+        <p:txBody>
+          <a:bodyPr wrap="square" lIns="0" tIns="0" rIns="0" bIns="0" rtlCol="0" anchor="ctr"/>
+          <a:lstStyle/>
+          <a:p>
+            <a:pPr marL="0" indent="0">
+              <a:buNone/>
+            </a:pPr>
+            <a:r>
+              <a:rPr lang="en-US" sz="2400" b="1" dirty="0">
+                <a:solidFill>
+                  <a:srgbClr val="FFB347"/>
+                </a:solidFill>
+                <a:latin typeface="Microsoft JhengHei" pitchFamily="34" charset="0"/>
+                <a:ea typeface="Microsoft JhengHei" pitchFamily="34" charset="-122"/>
+                <a:cs typeface="Microsoft JhengHei" pitchFamily="34" charset="-120"/>
+              </a:rPr>
+              <a:t>🏠 課後延伸挑戰</a:t>
+            </a:r>
+            <a:endParaRPr lang="en-US" sz="2400" dirty="0"/>
+          </a:p>
+        </p:txBody>
+      </p:sp>
+      <p:sp>
+        <p:nvSpPr>
+          <p:cNvPr id="5" name="Text 2"/>
+          <p:cNvSpPr/>
+          <p:nvPr/>
+        </p:nvSpPr>
+        <p:spPr>
+          <a:xfrm>
+            <a:off x="0" y="1234440"/>
+            <a:ext cx="12191695" cy="731520"/>
+          </a:xfrm>
+          <a:prstGeom prst="rect">
+            <a:avLst/>
+          </a:prstGeom>
+          <a:noFill/>
+          <a:ln/>
+        </p:spPr>
+        <p:txBody>
+          <a:bodyPr wrap="square" lIns="0" tIns="0" rIns="0" bIns="0" rtlCol="0" anchor="ctr"/>
+          <a:lstStyle/>
+          <a:p>
+            <a:pPr marL="0" indent="0" algn="ctr">
+              <a:buNone/>
+            </a:pPr>
+            <a:r>
+              <a:rPr lang="en-US" sz="3000" b="1" dirty="0">
+                <a:solidFill>
+                  <a:srgbClr val="F2E3C8"/>
+                </a:solidFill>
+                <a:latin typeface="Microsoft JhengHei" pitchFamily="34" charset="0"/>
+                <a:ea typeface="Microsoft JhengHei" pitchFamily="34" charset="-122"/>
+                <a:cs typeface="Microsoft JhengHei" pitchFamily="34" charset="-120"/>
+              </a:rPr>
+              <a:t>想一想：把灰色的色階增加為 8 種，</a:t>
+            </a:r>
+            <a:endParaRPr lang="en-US" sz="3000" dirty="0"/>
+          </a:p>
+        </p:txBody>
+      </p:sp>
+      <p:sp>
+        <p:nvSpPr>
+          <p:cNvPr id="6" name="Text 3"/>
+          <p:cNvSpPr/>
+          <p:nvPr/>
+        </p:nvSpPr>
+        <p:spPr>
+          <a:xfrm>
+            <a:off x="0" y="1965960"/>
+            <a:ext cx="12191695" cy="731520"/>
+          </a:xfrm>
+          <a:prstGeom prst="rect">
+            <a:avLst/>
+          </a:prstGeom>
+          <a:noFill/>
+          <a:ln/>
+        </p:spPr>
+        <p:txBody>
+          <a:bodyPr wrap="square" lIns="0" tIns="0" rIns="0" bIns="0" rtlCol="0" anchor="ctr"/>
+          <a:lstStyle/>
+          <a:p>
+            <a:pPr marL="0" indent="0" algn="ctr">
+              <a:buNone/>
+            </a:pPr>
+            <a:r>
+              <a:rPr lang="en-US" sz="3600" b="1" dirty="0">
+                <a:solidFill>
+                  <a:srgbClr val="5EC8F2"/>
+                </a:solidFill>
+                <a:latin typeface="Microsoft JhengHei" pitchFamily="34" charset="0"/>
+                <a:ea typeface="Microsoft JhengHei" pitchFamily="34" charset="-122"/>
+                <a:cs typeface="Microsoft JhengHei" pitchFamily="34" charset="-120"/>
+              </a:rPr>
+              <a:t>訊號要怎麼約定呢？</a:t>
+            </a:r>
+            <a:endParaRPr lang="en-US" sz="3600" dirty="0"/>
+          </a:p>
+        </p:txBody>
+      </p:sp>
+      <p:sp>
+        <p:nvSpPr>
+          <p:cNvPr id="7" name="Shape 4"/>
+          <p:cNvSpPr/>
+          <p:nvPr/>
+        </p:nvSpPr>
+        <p:spPr>
+          <a:xfrm>
+            <a:off x="2474824" y="2971800"/>
+            <a:ext cx="841248" cy="841248"/>
+          </a:xfrm>
+          <a:prstGeom prst="rect">
+            <a:avLst/>
+          </a:prstGeom>
+          <a:solidFill>
+            <a:srgbClr val="0A0A0A"/>
+          </a:solidFill>
+          <a:ln w="12700">
+            <a:solidFill>
+              <a:srgbClr val="1E3A5C"/>
+            </a:solidFill>
+            <a:prstDash val="solid"/>
+          </a:ln>
+        </p:spPr>
+      </p:sp>
+      <p:sp>
+        <p:nvSpPr>
+          <p:cNvPr id="9" name="Shape 6"/>
+          <p:cNvSpPr/>
+          <p:nvPr/>
+        </p:nvSpPr>
+        <p:spPr>
+          <a:xfrm>
+            <a:off x="3389224" y="2971800"/>
+            <a:ext cx="841248" cy="841248"/>
+          </a:xfrm>
+          <a:prstGeom prst="rect">
+            <a:avLst/>
+          </a:prstGeom>
+          <a:solidFill>
+            <a:srgbClr val="2B2B2B"/>
+          </a:solidFill>
+          <a:ln w="12700">
+            <a:solidFill>
+              <a:srgbClr val="1E3A5C"/>
+            </a:solidFill>
+            <a:prstDash val="solid"/>
+          </a:ln>
+        </p:spPr>
+      </p:sp>
+      <p:sp>
+        <p:nvSpPr>
+          <p:cNvPr id="11" name="Shape 8"/>
+          <p:cNvSpPr/>
+          <p:nvPr/>
+        </p:nvSpPr>
+        <p:spPr>
+          <a:xfrm>
+            <a:off x="4303624" y="2971800"/>
+            <a:ext cx="841248" cy="841248"/>
+          </a:xfrm>
+          <a:prstGeom prst="rect">
+            <a:avLst/>
+          </a:prstGeom>
+          <a:solidFill>
+            <a:srgbClr val="474747"/>
+          </a:solidFill>
+          <a:ln w="12700">
+            <a:solidFill>
+              <a:srgbClr val="1E3A5C"/>
+            </a:solidFill>
+            <a:prstDash val="solid"/>
+          </a:ln>
+        </p:spPr>
+      </p:sp>
+      <p:sp>
+        <p:nvSpPr>
+          <p:cNvPr id="13" name="Shape 10"/>
+          <p:cNvSpPr/>
+          <p:nvPr/>
+        </p:nvSpPr>
+        <p:spPr>
+          <a:xfrm>
+            <a:off x="5218024" y="2971800"/>
+            <a:ext cx="841248" cy="841248"/>
+          </a:xfrm>
+          <a:prstGeom prst="rect">
+            <a:avLst/>
+          </a:prstGeom>
+          <a:solidFill>
+            <a:srgbClr val="666666"/>
+          </a:solidFill>
+          <a:ln w="12700">
+            <a:solidFill>
+              <a:srgbClr val="1E3A5C"/>
+            </a:solidFill>
+            <a:prstDash val="solid"/>
+          </a:ln>
+        </p:spPr>
+      </p:sp>
+      <p:sp>
+        <p:nvSpPr>
+          <p:cNvPr id="15" name="Shape 12"/>
+          <p:cNvSpPr/>
+          <p:nvPr/>
+        </p:nvSpPr>
+        <p:spPr>
+          <a:xfrm>
+            <a:off x="6132424" y="2971800"/>
+            <a:ext cx="841248" cy="841248"/>
+          </a:xfrm>
+          <a:prstGeom prst="rect">
+            <a:avLst/>
+          </a:prstGeom>
+          <a:solidFill>
+            <a:srgbClr val="898989"/>
+          </a:solidFill>
+          <a:ln w="12700">
+            <a:solidFill>
+              <a:srgbClr val="1E3A5C"/>
+            </a:solidFill>
+            <a:prstDash val="solid"/>
+          </a:ln>
+        </p:spPr>
+      </p:sp>
+      <p:sp>
+        <p:nvSpPr>
+          <p:cNvPr id="17" name="Shape 14"/>
+          <p:cNvSpPr/>
+          <p:nvPr/>
+        </p:nvSpPr>
+        <p:spPr>
+          <a:xfrm>
+            <a:off x="7046824" y="2971800"/>
+            <a:ext cx="841248" cy="841248"/>
+          </a:xfrm>
+          <a:prstGeom prst="rect">
+            <a:avLst/>
+          </a:prstGeom>
+          <a:solidFill>
+            <a:srgbClr val="ABABAB"/>
+          </a:solidFill>
+          <a:ln w="12700">
+            <a:solidFill>
+              <a:srgbClr val="1E3A5C"/>
+            </a:solidFill>
+            <a:prstDash val="solid"/>
+          </a:ln>
+        </p:spPr>
+      </p:sp>
+      <p:sp>
+        <p:nvSpPr>
+          <p:cNvPr id="19" name="Shape 16"/>
+          <p:cNvSpPr/>
+          <p:nvPr/>
+        </p:nvSpPr>
+        <p:spPr>
+          <a:xfrm>
+            <a:off x="7961224" y="2971800"/>
+            <a:ext cx="841248" cy="841248"/>
+          </a:xfrm>
+          <a:prstGeom prst="rect">
+            <a:avLst/>
+          </a:prstGeom>
+          <a:solidFill>
+            <a:srgbClr val="D0D0D0"/>
+          </a:solidFill>
+          <a:ln w="12700">
+            <a:solidFill>
+              <a:srgbClr val="1E3A5C"/>
+            </a:solidFill>
+            <a:prstDash val="solid"/>
+          </a:ln>
+        </p:spPr>
+      </p:sp>
+      <p:sp>
+        <p:nvSpPr>
+          <p:cNvPr id="21" name="Shape 18"/>
+          <p:cNvSpPr/>
+          <p:nvPr/>
+        </p:nvSpPr>
+        <p:spPr>
+          <a:xfrm>
+            <a:off x="8875624" y="2971800"/>
+            <a:ext cx="841248" cy="841248"/>
+          </a:xfrm>
+          <a:prstGeom prst="rect">
+            <a:avLst/>
+          </a:prstGeom>
+          <a:solidFill>
+            <a:srgbClr val="F5F1E8"/>
+          </a:solidFill>
+          <a:ln w="12700">
+            <a:solidFill>
+              <a:srgbClr val="1E3A5C"/>
+            </a:solidFill>
+            <a:prstDash val="solid"/>
+          </a:ln>
+        </p:spPr>
+      </p:sp>
+      <p:sp>
+        <p:nvSpPr>
+          <p:cNvPr id="23" name="Shape 20"/>
+          <p:cNvSpPr/>
+          <p:nvPr/>
+        </p:nvSpPr>
+        <p:spPr>
+          <a:xfrm>
+            <a:off x="1371599" y="4617720"/>
+            <a:ext cx="10136909" cy="1371600"/>
+          </a:xfrm>
+          <a:prstGeom prst="roundRect">
+            <a:avLst>
+              <a:gd name="adj" fmla="val 5333"/>
+            </a:avLst>
+          </a:prstGeom>
+          <a:solidFill>
+            <a:srgbClr val="0D1424"/>
+          </a:solidFill>
+          <a:ln w="12700">
+            <a:solidFill>
+              <a:srgbClr val="1E3A5C"/>
+            </a:solidFill>
+            <a:prstDash val="solid"/>
+          </a:ln>
+        </p:spPr>
+      </p:sp>
+      <p:sp>
+        <p:nvSpPr>
+          <p:cNvPr id="24" name="Text 21"/>
+          <p:cNvSpPr/>
+          <p:nvPr/>
+        </p:nvSpPr>
+        <p:spPr>
+          <a:xfrm>
+            <a:off x="1767378" y="4846320"/>
+            <a:ext cx="9464040" cy="1005840"/>
+          </a:xfrm>
+          <a:prstGeom prst="rect">
+            <a:avLst/>
+          </a:prstGeom>
+          <a:noFill/>
+          <a:ln/>
+        </p:spPr>
+        <p:txBody>
+          <a:bodyPr wrap="square" lIns="0" tIns="0" rIns="0" bIns="0" rtlCol="0" anchor="t"/>
+          <a:lstStyle/>
+          <a:p>
+            <a:pPr marL="0" indent="0">
+              <a:spcAft>
+                <a:spcPts val="500"/>
+              </a:spcAft>
+              <a:buNone/>
+            </a:pPr>
+            <a:r>
+              <a:rPr lang="en-US" sz="2500" dirty="0" err="1" smtClean="0">
+                <a:solidFill>
+                  <a:srgbClr val="C9D6E8"/>
+                </a:solidFill>
+                <a:latin typeface="Microsoft JhengHei" pitchFamily="34" charset="0"/>
+                <a:ea typeface="Microsoft JhengHei" pitchFamily="34" charset="-122"/>
+                <a:cs typeface="Microsoft JhengHei" pitchFamily="34" charset="-120"/>
+              </a:rPr>
+              <a:t>提示</a:t>
+            </a:r>
+            <a:endParaRPr lang="en-US" sz="2500" dirty="0" smtClean="0">
+              <a:solidFill>
+                <a:srgbClr val="C9D6E8"/>
+              </a:solidFill>
+              <a:latin typeface="Microsoft JhengHei" pitchFamily="34" charset="0"/>
+              <a:ea typeface="Microsoft JhengHei" pitchFamily="34" charset="-122"/>
+              <a:cs typeface="Microsoft JhengHei" pitchFamily="34" charset="-120"/>
+            </a:endParaRPr>
+          </a:p>
+          <a:p>
+            <a:pPr marL="0" indent="0">
+              <a:spcAft>
+                <a:spcPts val="500"/>
+              </a:spcAft>
+              <a:buNone/>
+            </a:pPr>
+            <a:r>
+              <a:rPr lang="en-US" sz="2200" dirty="0" err="1" smtClean="0">
+                <a:solidFill>
+                  <a:srgbClr val="C9D6E8"/>
+                </a:solidFill>
+                <a:latin typeface="Microsoft JhengHei" pitchFamily="34" charset="0"/>
+                <a:ea typeface="Microsoft JhengHei" pitchFamily="34" charset="-122"/>
+                <a:cs typeface="Microsoft JhengHei" pitchFamily="34" charset="-120"/>
+              </a:rPr>
+              <a:t>兩個</a:t>
+            </a:r>
+            <a:r>
+              <a:rPr lang="en-US" sz="2200" dirty="0" smtClean="0">
+                <a:solidFill>
+                  <a:srgbClr val="C9D6E8"/>
+                </a:solidFill>
+                <a:latin typeface="Microsoft JhengHei" pitchFamily="34" charset="0"/>
+                <a:ea typeface="Microsoft JhengHei" pitchFamily="34" charset="-122"/>
+                <a:cs typeface="Microsoft JhengHei" pitchFamily="34" charset="-120"/>
+              </a:rPr>
+              <a:t> </a:t>
+            </a:r>
+            <a:r>
+              <a:rPr lang="en-US" sz="2200" dirty="0">
+                <a:solidFill>
+                  <a:srgbClr val="C9D6E8"/>
+                </a:solidFill>
+                <a:latin typeface="Microsoft JhengHei" pitchFamily="34" charset="0"/>
+                <a:ea typeface="Microsoft JhengHei" pitchFamily="34" charset="-122"/>
+                <a:cs typeface="Microsoft JhengHei" pitchFamily="34" charset="-120"/>
+              </a:rPr>
+              <a:t>0／1 訊號只有 00、01、10、11 四種組合，8 </a:t>
+            </a:r>
+            <a:r>
+              <a:rPr lang="en-US" sz="2200" dirty="0" err="1" smtClean="0">
+                <a:solidFill>
+                  <a:srgbClr val="C9D6E8"/>
+                </a:solidFill>
+                <a:latin typeface="Microsoft JhengHei" pitchFamily="34" charset="0"/>
+                <a:ea typeface="Microsoft JhengHei" pitchFamily="34" charset="-122"/>
+                <a:cs typeface="Microsoft JhengHei" pitchFamily="34" charset="-120"/>
+              </a:rPr>
+              <a:t>種亮度</a:t>
+            </a:r>
+            <a:r>
+              <a:rPr lang="zh-TW" altLang="en-US" sz="2200" dirty="0" smtClean="0">
+                <a:solidFill>
+                  <a:srgbClr val="C9D6E8"/>
+                </a:solidFill>
+                <a:latin typeface="Microsoft JhengHei" pitchFamily="34" charset="0"/>
+                <a:ea typeface="Microsoft JhengHei" pitchFamily="34" charset="-122"/>
+                <a:cs typeface="Microsoft JhengHei" pitchFamily="34" charset="-120"/>
+              </a:rPr>
+              <a:t>不夠用，怎麼辦？</a:t>
+            </a:r>
+            <a:endParaRPr lang="en-US" sz="2200" dirty="0"/>
+          </a:p>
+        </p:txBody>
+      </p:sp>
+    </p:spTree>
+  </p:cSld>
+  <p:clrMapOvr>
+    <a:masterClrMapping/>
+  </p:clrMapOvr>
+</p:sld>
+</file>
+
+<file path=ppt/slides/slide14.xml><?xml version="1.0" encoding="utf-8"?>
 <p:sld xmlns:a="http://schemas.openxmlformats.org/drawingml/2006/main" xmlns:r="http://schemas.openxmlformats.org/officeDocument/2006/relationships" xmlns:p="http://schemas.openxmlformats.org/presentationml/2006/main">
   <p:cSld name="Slide 12">
     <p:bg>

--- a/slides-3-gray-levels.pptx
+++ b/slides-3-gray-levels.pptx
@@ -5,7 +5,7 @@
     <p:sldMasterId id="2147483648" r:id="rId1"/>
   </p:sldMasterIdLst>
   <p:notesMasterIdLst>
-    <p:notesMasterId r:id="rId15"/>
+    <p:notesMasterId r:id="rId16"/>
   </p:notesMasterIdLst>
   <p:sldIdLst>
     <p:sldId id="256" r:id="rId2"/>
@@ -19,9 +19,9 @@
     <p:sldId id="263" r:id="rId10"/>
     <p:sldId id="264" r:id="rId11"/>
     <p:sldId id="265" r:id="rId12"/>
-    <p:sldId id="270" r:id="rId20"/>
-    <p:sldId id="266" r:id="rId13"/>
-    <p:sldId id="267" r:id="rId14"/>
+    <p:sldId id="270" r:id="rId13"/>
+    <p:sldId id="266" r:id="rId14"/>
+    <p:sldId id="267" r:id="rId15"/>
   </p:sldIdLst>
   <p:sldSz cx="12192000" cy="6858000"/>
   <p:notesSz cx="6858000" cy="12192000"/>
@@ -579,7 +579,7 @@
           <a:p>
             <a:fld id="{F7021451-1387-4CA6-816F-3879F97B5CBC}" type="slidenum">
               <a:rPr lang="en-US"/>
-              <a:t>12</a:t>
+              <a:t>13</a:t>
             </a:fld>
             <a:endParaRPr lang="en-US"/>
           </a:p>
@@ -666,7 +666,7 @@
           <a:p>
             <a:fld id="{F7021451-1387-4CA6-816F-3879F97B5CBC}" type="slidenum">
               <a:rPr lang="en-US"/>
-              <a:t>13</a:t>
+              <a:t>14</a:t>
             </a:fld>
             <a:endParaRPr lang="en-US"/>
           </a:p>
@@ -3276,18 +3276,7 @@
                 <a:ea typeface="Microsoft JhengHei" pitchFamily="34" charset="-122"/>
                 <a:cs typeface="Microsoft JhengHei" pitchFamily="34" charset="-120"/>
               </a:rPr>
-              <a:t>顏色，這個數字</a:t>
-            </a:r>
-            <a:r>
-              <a:rPr lang="zh-TW" altLang="en-US" b="1" dirty="0" smtClean="0">
-                <a:solidFill>
-                  <a:srgbClr val="F2E3C8"/>
-                </a:solidFill>
-                <a:latin typeface="Microsoft JhengHei" pitchFamily="34" charset="0"/>
-                <a:ea typeface="Microsoft JhengHei" pitchFamily="34" charset="-122"/>
-                <a:cs typeface="Microsoft JhengHei" pitchFamily="34" charset="-120"/>
-              </a:rPr>
-              <a:t>我們稱之為「位元」，</a:t>
+              <a:t>顏色，這個數字我們稱之為「位元」，</a:t>
             </a:r>
             <a:r>
               <a:rPr lang="en-US" altLang="zh-TW" b="1" dirty="0" smtClean="0">
@@ -4076,7 +4065,7 @@
               <a:buNone/>
             </a:pPr>
             <a:r>
-              <a:rPr lang="en-US" sz="3000" b="1" dirty="0">
+              <a:rPr lang="en-US" sz="3000" b="1" dirty="0" err="1" smtClean="0">
                 <a:solidFill>
                   <a:srgbClr val="F2E3C8"/>
                 </a:solidFill>
@@ -4084,7 +4073,73 @@
                 <a:ea typeface="Microsoft JhengHei" pitchFamily="34" charset="-122"/>
                 <a:cs typeface="Microsoft JhengHei" pitchFamily="34" charset="-120"/>
               </a:rPr>
-              <a:t>在平板為自己的照片套上黑白（灰階）濾鏡，</a:t>
+              <a:t>在平板為自己的照片</a:t>
+            </a:r>
+            <a:r>
+              <a:rPr lang="zh-TW" altLang="en-US" sz="3000" b="1" dirty="0" smtClean="0">
+                <a:solidFill>
+                  <a:srgbClr val="F2E3C8"/>
+                </a:solidFill>
+                <a:latin typeface="Microsoft JhengHei" pitchFamily="34" charset="0"/>
+                <a:ea typeface="Microsoft JhengHei" pitchFamily="34" charset="-122"/>
+                <a:cs typeface="Microsoft JhengHei" pitchFamily="34" charset="-120"/>
+              </a:rPr>
+              <a:t>改成</a:t>
+            </a:r>
+            <a:r>
+              <a:rPr lang="en-US" sz="3000" b="1" dirty="0" err="1" smtClean="0">
+                <a:solidFill>
+                  <a:srgbClr val="F2E3C8"/>
+                </a:solidFill>
+                <a:latin typeface="Microsoft JhengHei" pitchFamily="34" charset="0"/>
+                <a:ea typeface="Microsoft JhengHei" pitchFamily="34" charset="-122"/>
+                <a:cs typeface="Microsoft JhengHei" pitchFamily="34" charset="-120"/>
+              </a:rPr>
+              <a:t>黑白</a:t>
+            </a:r>
+            <a:r>
+              <a:rPr lang="en-US" sz="3000" b="1" dirty="0" err="1">
+                <a:solidFill>
+                  <a:srgbClr val="F2E3C8"/>
+                </a:solidFill>
+                <a:latin typeface="Microsoft JhengHei" pitchFamily="34" charset="0"/>
+                <a:ea typeface="Microsoft JhengHei" pitchFamily="34" charset="-122"/>
+                <a:cs typeface="Microsoft JhengHei" pitchFamily="34" charset="-120"/>
+              </a:rPr>
+              <a:t>（灰階</a:t>
+            </a:r>
+            <a:r>
+              <a:rPr lang="en-US" sz="3000" b="1" dirty="0" smtClean="0">
+                <a:solidFill>
+                  <a:srgbClr val="F2E3C8"/>
+                </a:solidFill>
+                <a:latin typeface="Microsoft JhengHei" pitchFamily="34" charset="0"/>
+                <a:ea typeface="Microsoft JhengHei" pitchFamily="34" charset="-122"/>
+                <a:cs typeface="Microsoft JhengHei" pitchFamily="34" charset="-120"/>
+              </a:rPr>
+              <a:t>）</a:t>
+            </a:r>
+            <a:r>
+              <a:rPr lang="zh-TW" altLang="en-US" sz="3000" b="1" smtClean="0">
+                <a:solidFill>
+                  <a:srgbClr val="F2E3C8"/>
+                </a:solidFill>
+                <a:latin typeface="Microsoft JhengHei" pitchFamily="34" charset="0"/>
+                <a:ea typeface="Microsoft JhengHei" pitchFamily="34" charset="-122"/>
+                <a:cs typeface="Microsoft JhengHei" pitchFamily="34" charset="-120"/>
+              </a:rPr>
+              <a:t>照片</a:t>
+            </a:r>
+            <a:r>
+              <a:rPr lang="en-US" sz="3000" b="1" smtClean="0">
+                <a:solidFill>
+                  <a:srgbClr val="F2E3C8"/>
+                </a:solidFill>
+                <a:latin typeface="Microsoft JhengHei" pitchFamily="34" charset="0"/>
+                <a:ea typeface="Microsoft JhengHei" pitchFamily="34" charset="-122"/>
+                <a:cs typeface="Microsoft JhengHei" pitchFamily="34" charset="-120"/>
+              </a:rPr>
+              <a:t>，</a:t>
             </a:r>
             <a:endParaRPr lang="en-US" sz="3000" dirty="0"/>
           </a:p>
@@ -4419,7 +4474,40 @@
                 <a:ea typeface="Microsoft JhengHei" pitchFamily="34" charset="-122"/>
                 <a:cs typeface="Microsoft JhengHei" pitchFamily="34" charset="-120"/>
               </a:rPr>
-              <a:t>黑白照片不是只剩黑與白——深深淺淺的灰階層次，靠的正是更多階的「亮度數字」。</a:t>
+              <a:t>黑白照片不是只剩黑與白</a:t>
+            </a:r>
+            <a:r>
+              <a:rPr lang="zh-TW" altLang="en-US" sz="2200" dirty="0" smtClean="0">
+                <a:solidFill>
+                  <a:srgbClr val="C9D6E8"/>
+                </a:solidFill>
+                <a:latin typeface="Microsoft JhengHei" pitchFamily="34" charset="0"/>
+                <a:ea typeface="Microsoft JhengHei" pitchFamily="34" charset="-122"/>
+                <a:cs typeface="Microsoft JhengHei" pitchFamily="34" charset="-120"/>
+              </a:rPr>
+              <a:t>，</a:t>
+            </a:r>
+            <a:r>
+              <a:rPr lang="en-US" sz="2200" dirty="0" err="1" smtClean="0">
+                <a:solidFill>
+                  <a:srgbClr val="C9D6E8"/>
+                </a:solidFill>
+                <a:latin typeface="Microsoft JhengHei" pitchFamily="34" charset="0"/>
+                <a:ea typeface="Microsoft JhengHei" pitchFamily="34" charset="-122"/>
+                <a:cs typeface="Microsoft JhengHei" pitchFamily="34" charset="-120"/>
+              </a:rPr>
+              <a:t>深深淺淺的灰階層次</a:t>
+            </a:r>
+            <a:r>
+              <a:rPr lang="en-US" sz="2200" dirty="0" err="1" smtClean="0">
+                <a:solidFill>
+                  <a:srgbClr val="C9D6E8"/>
+                </a:solidFill>
+                <a:latin typeface="Microsoft JhengHei" pitchFamily="34" charset="0"/>
+                <a:ea typeface="Microsoft JhengHei" pitchFamily="34" charset="-122"/>
+                <a:cs typeface="Microsoft JhengHei" pitchFamily="34" charset="-120"/>
+              </a:rPr>
+              <a:t>，靠的正是更多階的「亮度數字</a:t>
             </a:r>
             <a:r>
               <a:rPr lang="en-US" sz="2200" dirty="0" smtClean="0">
@@ -4430,40 +4518,7 @@
                 <a:ea typeface="Microsoft JhengHei" pitchFamily="34" charset="-122"/>
                 <a:cs typeface="Microsoft JhengHei" pitchFamily="34" charset="-120"/>
               </a:rPr>
-              <a:t/>
-            </a:r>
-            <a:r>
-              <a:rPr lang="en-US" sz="2200" dirty="0">
-                <a:solidFill>
-                  <a:srgbClr val="C9D6E8"/>
-                </a:solidFill>
-                <a:latin typeface="Microsoft JhengHei" pitchFamily="34" charset="0"/>
-                <a:ea typeface="Microsoft JhengHei" pitchFamily="34" charset="-122"/>
-                <a:cs typeface="Microsoft JhengHei" pitchFamily="34" charset="-120"/>
-              </a:rPr>
-              <a:t/>
-            </a:r>
-            <a:r>
-              <a:rPr lang="en-US" sz="2200" dirty="0" err="1" smtClean="0">
-                <a:solidFill>
-                  <a:srgbClr val="C9D6E8"/>
-                </a:solidFill>
-                <a:latin typeface="Microsoft JhengHei" pitchFamily="34" charset="0"/>
-                <a:ea typeface="Microsoft JhengHei" pitchFamily="34" charset="-122"/>
-                <a:cs typeface="Microsoft JhengHei" pitchFamily="34" charset="-120"/>
-              </a:rPr>
-              <a:t/>
-            </a:r>
-            <a:r>
-              <a:rPr lang="zh-TW" altLang="en-US" sz="2200" dirty="0" smtClean="0">
-                <a:solidFill>
-                  <a:srgbClr val="C9D6E8"/>
-                </a:solidFill>
-                <a:latin typeface="Microsoft JhengHei" pitchFamily="34" charset="0"/>
-                <a:ea typeface="Microsoft JhengHei" pitchFamily="34" charset="-122"/>
-                <a:cs typeface="Microsoft JhengHei" pitchFamily="34" charset="-120"/>
-              </a:rPr>
-              <a:t/>
+              <a:t>」。</a:t>
             </a:r>
             <a:endParaRPr lang="en-US" sz="2200" dirty="0"/>
           </a:p>
@@ -10633,29 +10688,7 @@
                 <a:ea typeface="Microsoft JhengHei" pitchFamily="34" charset="-122"/>
                 <a:cs typeface="Microsoft JhengHei" pitchFamily="34" charset="-120"/>
               </a:rPr>
-              <a:t>讓維</a:t>
-            </a:r>
-            <a:r>
-              <a:rPr lang="zh-TW" altLang="en-US" sz="5000" b="1" dirty="0" smtClean="0">
-                <a:solidFill>
-                  <a:srgbClr val="F2E3C8"/>
-                </a:solidFill>
-                <a:latin typeface="Microsoft JhengHei" pitchFamily="34" charset="0"/>
-                <a:ea typeface="Microsoft JhengHei" pitchFamily="34" charset="-122"/>
-                <a:cs typeface="Microsoft JhengHei" pitchFamily="34" charset="-120"/>
-              </a:rPr>
-              <a:t>京</a:t>
-            </a:r>
-            <a:r>
-              <a:rPr lang="zh-TW" altLang="en-US" sz="5000" b="1" dirty="0" smtClean="0">
-                <a:solidFill>
-                  <a:srgbClr val="F2E3C8"/>
-                </a:solidFill>
-                <a:latin typeface="Microsoft JhengHei" pitchFamily="34" charset="0"/>
-                <a:ea typeface="Microsoft JhengHei" pitchFamily="34" charset="-122"/>
-                <a:cs typeface="Microsoft JhengHei" pitchFamily="34" charset="-120"/>
-              </a:rPr>
-              <a:t>一號發送更清晰的照片！</a:t>
+              <a:t>讓維京一號發送更清晰的照片！</a:t>
             </a:r>
             <a:endParaRPr lang="en-US" sz="5000" dirty="0"/>
           </a:p>
@@ -10943,18 +10976,7 @@
                 <a:ea typeface="Microsoft JhengHei" pitchFamily="34" charset="-122"/>
                 <a:cs typeface="Microsoft JhengHei" pitchFamily="34" charset="-120"/>
               </a:rPr>
-              <a:t>每</a:t>
-            </a:r>
-            <a:r>
-              <a:rPr lang="zh-TW" altLang="en-US" sz="3000" dirty="0" smtClean="0">
-                <a:solidFill>
-                  <a:srgbClr val="F2E3C8"/>
-                </a:solidFill>
-                <a:latin typeface="Microsoft JhengHei" pitchFamily="34" charset="0"/>
-                <a:ea typeface="Microsoft JhengHei" pitchFamily="34" charset="-122"/>
-                <a:cs typeface="Microsoft JhengHei" pitchFamily="34" charset="-120"/>
-              </a:rPr>
-              <a:t>組先擔任</a:t>
+              <a:t>每組先擔任</a:t>
             </a:r>
             <a:r>
               <a:rPr lang="zh-TW" altLang="en-US" sz="3000" b="1" dirty="0" smtClean="0">
@@ -11129,18 +11151,7 @@
                 <a:ea typeface="Microsoft JhengHei" pitchFamily="34" charset="-122"/>
                 <a:cs typeface="Microsoft JhengHei" pitchFamily="34" charset="-120"/>
               </a:rPr>
-              <a:t>地球</a:t>
-            </a:r>
-            <a:r>
-              <a:rPr lang="zh-TW" altLang="en-US" sz="3000" b="1" dirty="0" smtClean="0">
-                <a:solidFill>
-                  <a:schemeClr val="accent2"/>
-                </a:solidFill>
-                <a:latin typeface="Microsoft JhengHei" pitchFamily="34" charset="0"/>
-                <a:ea typeface="Microsoft JhengHei" pitchFamily="34" charset="-122"/>
-                <a:cs typeface="Microsoft JhengHei" pitchFamily="34" charset="-120"/>
-              </a:rPr>
-              <a:t>訊號官</a:t>
+              <a:t>地球訊號官</a:t>
             </a:r>
             <a:r>
               <a:rPr lang="zh-TW" altLang="en-US" sz="3000" dirty="0" smtClean="0">
